--- a/tests/fixtures/decks/ai-ethics.pptx
+++ b/tests/fixtures/decks/ai-ethics.pptx
@@ -3830,7 +3830,7 @@
           <a:lstStyle/>
           <a:p>
             <a:r>
-              <a:t>DeckFM — Demo</a:t>
+              <a:t>Oz Radio — Demo</a:t>
             </a:r>
           </a:p>
         </p:txBody>
